--- a/Modelagem-BPMN-Lucidchart.pptx
+++ b/Modelagem-BPMN-Lucidchart.pptx
@@ -3120,14 +3120,13 @@
         </p:nvPicPr>
         <p:blipFill>
           <a:blip r:embed="rId3"/>
-          <a:stretch>
-            <a:fillRect/>
-          </a:stretch>
+          <a:srcRect l="1365" t="28108" r="19296" b="3251"/>
+          <a:stretch/>
         </p:blipFill>
         <p:spPr>
           <a:xfrm>
-            <a:off x="1924861" y="1268075"/>
-            <a:ext cx="8342277" cy="4518733"/>
+            <a:off x="80544" y="1483743"/>
+            <a:ext cx="12030605" cy="4735031"/>
           </a:xfrm>
           <a:prstGeom prst="rect">
             <a:avLst/>
@@ -4787,8 +4786,8 @@
         </p:blipFill>
         <p:spPr>
           <a:xfrm>
-            <a:off x="3435927" y="1421662"/>
-            <a:ext cx="5931416" cy="4983612"/>
+            <a:off x="2993366" y="1283157"/>
+            <a:ext cx="6538823" cy="5493959"/>
           </a:xfrm>
           <a:prstGeom prst="rect">
             <a:avLst/>
@@ -4957,8 +4956,8 @@
         </p:blipFill>
         <p:spPr>
           <a:xfrm>
-            <a:off x="2443358" y="1180504"/>
-            <a:ext cx="6660971" cy="5209310"/>
+            <a:off x="2522933" y="1180504"/>
+            <a:ext cx="7146133" cy="5588738"/>
           </a:xfrm>
           <a:prstGeom prst="rect">
             <a:avLst/>
@@ -5127,8 +5126,8 @@
         </p:blipFill>
         <p:spPr>
           <a:xfrm>
-            <a:off x="3112572" y="1317616"/>
-            <a:ext cx="5731996" cy="5047672"/>
+            <a:off x="2912853" y="1173248"/>
+            <a:ext cx="6366294" cy="5606243"/>
           </a:xfrm>
           <a:prstGeom prst="rect">
             <a:avLst/>
@@ -5284,455 +5283,7 @@
           <p:nvPr/>
         </p:nvPicPr>
         <p:blipFill>
-          <a:blip>
-            <a:extLst>
-              <a:ext uri="{96DAC541-7B7A-43D3-8B79-37D633B846F1}">
-                <asvg:svgBlip xmlns:asvg="http://schemas.microsoft.com/office/drawing/2016/SVG/main" r:embed="rId3"/>
-              </a:ext>
-            </a:extLst>
-          </a:blip>
-          <a:stretch>
-            <a:fillRect/>
-          </a:stretch>
-        </p:blipFill>
-        <p:spPr>
-          <a:xfrm>
-            <a:off x="764263" y="1871811"/>
-            <a:ext cx="235639" cy="235645"/>
-          </a:xfrm>
-          <a:prstGeom prst="rect">
-            <a:avLst/>
-          </a:prstGeom>
-        </p:spPr>
-      </p:pic>
-      <p:sp>
-        <p:nvSpPr>
-          <p:cNvPr id="6" name="Text 3"/>
-          <p:cNvSpPr/>
-          <p:nvPr/>
-        </p:nvSpPr>
-        <p:spPr>
-          <a:xfrm>
-            <a:off x="1215895" y="1864023"/>
-            <a:ext cx="4644413" cy="490339"/>
-          </a:xfrm>
-          <a:prstGeom prst="rect">
-            <a:avLst/>
-          </a:prstGeom>
-          <a:noFill/>
-          <a:ln/>
-        </p:spPr>
-        <p:txBody>
-          <a:bodyPr wrap="square" lIns="0" tIns="0" rIns="0" bIns="0" rtlCol="0" anchor="t">
-            <a:normAutofit/>
-          </a:bodyPr>
-          <a:lstStyle/>
-          <a:p>
-            <a:pPr marL="0" indent="0" algn="l">
-              <a:lnSpc>
-                <a:spcPct val="130000"/>
-              </a:lnSpc>
-              <a:buNone/>
-            </a:pPr>
-            <a:r>
-              <a:rPr lang="pt-BR" sz="1200" b="1" noProof="0" dirty="0">
-                <a:latin typeface="Open Sans Bold" pitchFamily="34" charset="0"/>
-                <a:ea typeface="Open Sans Bold" pitchFamily="34" charset="-122"/>
-                <a:cs typeface="Open Sans Bold" pitchFamily="34" charset="-120"/>
-              </a:rPr>
-              <a:t>Colaboração em nuvem</a:t>
-            </a:r>
-            <a:r>
-              <a:rPr lang="pt-BR" sz="1200" noProof="0" dirty="0">
-                <a:latin typeface="Open Sans" pitchFamily="34" charset="0"/>
-                <a:ea typeface="Open Sans" pitchFamily="34" charset="-122"/>
-                <a:cs typeface="Open Sans" pitchFamily="34" charset="-120"/>
-              </a:rPr>
-              <a:t> com sincronização em tempo real entre múltiplos usuários, eliminando conflitos de versão.</a:t>
-            </a:r>
-            <a:endParaRPr lang="pt-BR" sz="1200" noProof="0" dirty="0"/>
-          </a:p>
-        </p:txBody>
-      </p:sp>
-      <p:pic>
-        <p:nvPicPr>
-          <p:cNvPr id="7" name="Image 1" descr="preencoded.png"/>
-          <p:cNvPicPr>
-            <a:picLocks noChangeAspect="1"/>
-          </p:cNvPicPr>
-          <p:nvPr/>
-        </p:nvPicPr>
-        <p:blipFill>
-          <a:blip>
-            <a:extLst>
-              <a:ext uri="{96DAC541-7B7A-43D3-8B79-37D633B846F1}">
-                <asvg:svgBlip xmlns:asvg="http://schemas.microsoft.com/office/drawing/2016/SVG/main" r:embed="rId3"/>
-              </a:ext>
-            </a:extLst>
-          </a:blip>
-          <a:stretch>
-            <a:fillRect/>
-          </a:stretch>
-        </p:blipFill>
-        <p:spPr>
-          <a:xfrm>
-            <a:off x="764263" y="2660600"/>
-            <a:ext cx="235639" cy="235645"/>
-          </a:xfrm>
-          <a:prstGeom prst="rect">
-            <a:avLst/>
-          </a:prstGeom>
-        </p:spPr>
-      </p:pic>
-      <p:sp>
-        <p:nvSpPr>
-          <p:cNvPr id="8" name="Text 4"/>
-          <p:cNvSpPr/>
-          <p:nvPr/>
-        </p:nvSpPr>
-        <p:spPr>
-          <a:xfrm>
-            <a:off x="1215895" y="2652812"/>
-            <a:ext cx="4644413" cy="490339"/>
-          </a:xfrm>
-          <a:prstGeom prst="rect">
-            <a:avLst/>
-          </a:prstGeom>
-          <a:noFill/>
-          <a:ln/>
-        </p:spPr>
-        <p:txBody>
-          <a:bodyPr wrap="square" lIns="0" tIns="0" rIns="0" bIns="0" rtlCol="0" anchor="t">
-            <a:normAutofit/>
-          </a:bodyPr>
-          <a:lstStyle/>
-          <a:p>
-            <a:pPr marL="0" indent="0" algn="l">
-              <a:lnSpc>
-                <a:spcPct val="130000"/>
-              </a:lnSpc>
-              <a:buNone/>
-            </a:pPr>
-            <a:r>
-              <a:rPr lang="pt-BR" sz="1200" b="1" noProof="0" dirty="0">
-                <a:latin typeface="Open Sans Bold" pitchFamily="34" charset="0"/>
-                <a:ea typeface="Open Sans Bold" pitchFamily="34" charset="-122"/>
-                <a:cs typeface="Open Sans Bold" pitchFamily="34" charset="-120"/>
-              </a:rPr>
-              <a:t>Curva de aprendizado rápida</a:t>
-            </a:r>
-            <a:r>
-              <a:rPr lang="pt-BR" sz="1200" noProof="0" dirty="0">
-                <a:latin typeface="Open Sans" pitchFamily="34" charset="0"/>
-                <a:ea typeface="Open Sans" pitchFamily="34" charset="-122"/>
-                <a:cs typeface="Open Sans" pitchFamily="34" charset="-120"/>
-              </a:rPr>
-              <a:t>, permitindo produtividade imediata mesmo para usuários sem experiência prévia.</a:t>
-            </a:r>
-            <a:endParaRPr lang="pt-BR" sz="1200" noProof="0" dirty="0"/>
-          </a:p>
-        </p:txBody>
-      </p:sp>
-      <p:pic>
-        <p:nvPicPr>
-          <p:cNvPr id="9" name="Image 2" descr="preencoded.png"/>
-          <p:cNvPicPr>
-            <a:picLocks noChangeAspect="1"/>
-          </p:cNvPicPr>
-          <p:nvPr/>
-        </p:nvPicPr>
-        <p:blipFill>
-          <a:blip>
-            <a:extLst>
-              <a:ext uri="{96DAC541-7B7A-43D3-8B79-37D633B846F1}">
-                <asvg:svgBlip xmlns:asvg="http://schemas.microsoft.com/office/drawing/2016/SVG/main" r:embed="rId3"/>
-              </a:ext>
-            </a:extLst>
-          </a:blip>
-          <a:stretch>
-            <a:fillRect/>
-          </a:stretch>
-        </p:blipFill>
-        <p:spPr>
-          <a:xfrm>
-            <a:off x="764263" y="3449389"/>
-            <a:ext cx="235639" cy="235645"/>
-          </a:xfrm>
-          <a:prstGeom prst="rect">
-            <a:avLst/>
-          </a:prstGeom>
-        </p:spPr>
-      </p:pic>
-      <p:sp>
-        <p:nvSpPr>
-          <p:cNvPr id="10" name="Text 5"/>
-          <p:cNvSpPr/>
-          <p:nvPr/>
-        </p:nvSpPr>
-        <p:spPr>
-          <a:xfrm>
-            <a:off x="1215895" y="3441601"/>
-            <a:ext cx="4644413" cy="490339"/>
-          </a:xfrm>
-          <a:prstGeom prst="rect">
-            <a:avLst/>
-          </a:prstGeom>
-          <a:noFill/>
-          <a:ln/>
-        </p:spPr>
-        <p:txBody>
-          <a:bodyPr wrap="square" lIns="0" tIns="0" rIns="0" bIns="0" rtlCol="0" anchor="t">
-            <a:normAutofit/>
-          </a:bodyPr>
-          <a:lstStyle/>
-          <a:p>
-            <a:pPr marL="0" indent="0" algn="l">
-              <a:lnSpc>
-                <a:spcPct val="130000"/>
-              </a:lnSpc>
-              <a:buNone/>
-            </a:pPr>
-            <a:r>
-              <a:rPr lang="pt-BR" sz="1200" b="1" noProof="0" dirty="0">
-                <a:latin typeface="Open Sans Bold" pitchFamily="34" charset="0"/>
-                <a:ea typeface="Open Sans Bold" pitchFamily="34" charset="-122"/>
-                <a:cs typeface="Open Sans Bold" pitchFamily="34" charset="-120"/>
-              </a:rPr>
-              <a:t>Recursos avançados de IA</a:t>
-            </a:r>
-            <a:r>
-              <a:rPr lang="pt-BR" sz="1200" noProof="0" dirty="0">
-                <a:latin typeface="Open Sans" pitchFamily="34" charset="0"/>
-                <a:ea typeface="Open Sans" pitchFamily="34" charset="-122"/>
-                <a:cs typeface="Open Sans" pitchFamily="34" charset="-120"/>
-              </a:rPr>
-              <a:t> para automação de tarefas repetitivas e sugestões de otimização de processos.</a:t>
-            </a:r>
-            <a:endParaRPr lang="pt-BR" sz="1200" noProof="0" dirty="0"/>
-          </a:p>
-        </p:txBody>
-      </p:sp>
-      <p:pic>
-        <p:nvPicPr>
-          <p:cNvPr id="11" name="Image 3" descr="preencoded.png"/>
-          <p:cNvPicPr>
-            <a:picLocks noChangeAspect="1"/>
-          </p:cNvPicPr>
-          <p:nvPr/>
-        </p:nvPicPr>
-        <p:blipFill>
-          <a:blip>
-            <a:extLst>
-              <a:ext uri="{96DAC541-7B7A-43D3-8B79-37D633B846F1}">
-                <asvg:svgBlip xmlns:asvg="http://schemas.microsoft.com/office/drawing/2016/SVG/main" r:embed="rId3"/>
-              </a:ext>
-            </a:extLst>
-          </a:blip>
-          <a:stretch>
-            <a:fillRect/>
-          </a:stretch>
-        </p:blipFill>
-        <p:spPr>
-          <a:xfrm>
-            <a:off x="764263" y="4238179"/>
-            <a:ext cx="235639" cy="235645"/>
-          </a:xfrm>
-          <a:prstGeom prst="rect">
-            <a:avLst/>
-          </a:prstGeom>
-        </p:spPr>
-      </p:pic>
-      <p:sp>
-        <p:nvSpPr>
-          <p:cNvPr id="12" name="Text 6"/>
-          <p:cNvSpPr/>
-          <p:nvPr/>
-        </p:nvSpPr>
-        <p:spPr>
-          <a:xfrm>
-            <a:off x="1215895" y="4230390"/>
-            <a:ext cx="4644413" cy="490339"/>
-          </a:xfrm>
-          <a:prstGeom prst="rect">
-            <a:avLst/>
-          </a:prstGeom>
-          <a:noFill/>
-          <a:ln/>
-        </p:spPr>
-        <p:txBody>
-          <a:bodyPr wrap="square" lIns="0" tIns="0" rIns="0" bIns="0" rtlCol="0" anchor="t">
-            <a:normAutofit/>
-          </a:bodyPr>
-          <a:lstStyle/>
-          <a:p>
-            <a:pPr marL="0" indent="0" algn="l">
-              <a:lnSpc>
-                <a:spcPct val="130000"/>
-              </a:lnSpc>
-              <a:buNone/>
-            </a:pPr>
-            <a:r>
-              <a:rPr lang="pt-BR" sz="1200" b="1" noProof="0" dirty="0">
-                <a:latin typeface="Open Sans Bold" pitchFamily="34" charset="0"/>
-                <a:ea typeface="Open Sans Bold" pitchFamily="34" charset="-122"/>
-                <a:cs typeface="Open Sans Bold" pitchFamily="34" charset="-120"/>
-              </a:rPr>
-              <a:t>Suporte completo e nativo</a:t>
-            </a:r>
-            <a:r>
-              <a:rPr lang="pt-BR" sz="1200" noProof="0" dirty="0">
-                <a:latin typeface="Open Sans" pitchFamily="34" charset="0"/>
-                <a:ea typeface="Open Sans" pitchFamily="34" charset="-122"/>
-                <a:cs typeface="Open Sans" pitchFamily="34" charset="-120"/>
-              </a:rPr>
-              <a:t> à notação BPMN 2.0, com bibliotecas de formas padronizadas e pré-configuradas.</a:t>
-            </a:r>
-            <a:endParaRPr lang="pt-BR" sz="1200" noProof="0" dirty="0"/>
-          </a:p>
-        </p:txBody>
-      </p:sp>
-      <p:pic>
-        <p:nvPicPr>
-          <p:cNvPr id="13" name="Image 4" descr="preencoded.png"/>
-          <p:cNvPicPr>
-            <a:picLocks noChangeAspect="1"/>
-          </p:cNvPicPr>
-          <p:nvPr/>
-        </p:nvPicPr>
-        <p:blipFill>
-          <a:blip>
-            <a:extLst>
-              <a:ext uri="{96DAC541-7B7A-43D3-8B79-37D633B846F1}">
-                <asvg:svgBlip xmlns:asvg="http://schemas.microsoft.com/office/drawing/2016/SVG/main" r:embed="rId3"/>
-              </a:ext>
-            </a:extLst>
-          </a:blip>
-          <a:stretch>
-            <a:fillRect/>
-          </a:stretch>
-        </p:blipFill>
-        <p:spPr>
-          <a:xfrm>
-            <a:off x="764263" y="5026968"/>
-            <a:ext cx="235639" cy="235645"/>
-          </a:xfrm>
-          <a:prstGeom prst="rect">
-            <a:avLst/>
-          </a:prstGeom>
-        </p:spPr>
-      </p:pic>
-      <p:sp>
-        <p:nvSpPr>
-          <p:cNvPr id="14" name="Text 7"/>
-          <p:cNvSpPr/>
-          <p:nvPr/>
-        </p:nvSpPr>
-        <p:spPr>
-          <a:xfrm>
-            <a:off x="1215895" y="5019179"/>
-            <a:ext cx="4644413" cy="490339"/>
-          </a:xfrm>
-          <a:prstGeom prst="rect">
-            <a:avLst/>
-          </a:prstGeom>
-          <a:noFill/>
-          <a:ln/>
-        </p:spPr>
-        <p:txBody>
-          <a:bodyPr wrap="square" lIns="0" tIns="0" rIns="0" bIns="0" rtlCol="0" anchor="t">
-            <a:normAutofit/>
-          </a:bodyPr>
-          <a:lstStyle/>
-          <a:p>
-            <a:pPr marL="0" indent="0" algn="l">
-              <a:lnSpc>
-                <a:spcPct val="130000"/>
-              </a:lnSpc>
-              <a:buNone/>
-            </a:pPr>
-            <a:r>
-              <a:rPr lang="pt-BR" sz="1200" b="1" noProof="0" dirty="0">
-                <a:latin typeface="Open Sans Bold" pitchFamily="34" charset="0"/>
-                <a:ea typeface="Open Sans Bold" pitchFamily="34" charset="-122"/>
-                <a:cs typeface="Open Sans Bold" pitchFamily="34" charset="-120"/>
-              </a:rPr>
-              <a:t>Interface responsiva</a:t>
-            </a:r>
-            <a:r>
-              <a:rPr lang="pt-BR" sz="1200" noProof="0" dirty="0">
-                <a:latin typeface="Open Sans" pitchFamily="34" charset="0"/>
-                <a:ea typeface="Open Sans" pitchFamily="34" charset="-122"/>
-                <a:cs typeface="Open Sans" pitchFamily="34" charset="-120"/>
-              </a:rPr>
-              <a:t> e acessível em diferentes dispositivos e sistemas operacionais.</a:t>
-            </a:r>
-            <a:endParaRPr lang="pt-BR" sz="1200" noProof="0" dirty="0"/>
-          </a:p>
-        </p:txBody>
-      </p:sp>
-      <p:sp>
-        <p:nvSpPr>
-          <p:cNvPr id="15" name="Text 8"/>
-          <p:cNvSpPr/>
-          <p:nvPr/>
-        </p:nvSpPr>
-        <p:spPr>
-          <a:xfrm>
-            <a:off x="6293883" y="1444228"/>
-            <a:ext cx="5242687" cy="251916"/>
-          </a:xfrm>
-          <a:prstGeom prst="rect">
-            <a:avLst/>
-          </a:prstGeom>
-          <a:noFill/>
-          <a:ln/>
-        </p:spPr>
-        <p:txBody>
-          <a:bodyPr wrap="none" lIns="0" tIns="0" rIns="0" bIns="0" rtlCol="0" anchor="t"/>
-          <a:lstStyle/>
-          <a:p>
-            <a:pPr marL="0" indent="0" algn="l">
-              <a:lnSpc>
-                <a:spcPct val="104000"/>
-              </a:lnSpc>
-              <a:buNone/>
-            </a:pPr>
-            <a:r>
-              <a:rPr lang="pt-BR" sz="1500" noProof="0" dirty="0">
-                <a:solidFill>
-                  <a:srgbClr val="000000"/>
-                </a:solidFill>
-                <a:latin typeface="Libre Baskerville" pitchFamily="34" charset="0"/>
-                <a:ea typeface="Libre Baskerville" pitchFamily="34" charset="-122"/>
-                <a:cs typeface="Libre Baskerville" pitchFamily="34" charset="-120"/>
-              </a:rPr>
-              <a:t>⚠️</a:t>
-            </a:r>
-            <a:r>
-              <a:rPr lang="pt-BR" sz="1500" noProof="0" dirty="0">
-                <a:solidFill>
-                  <a:srgbClr val="403CCF"/>
-                </a:solidFill>
-                <a:latin typeface="Libre Baskerville" pitchFamily="34" charset="0"/>
-                <a:ea typeface="Libre Baskerville" pitchFamily="34" charset="-122"/>
-                <a:cs typeface="Libre Baskerville" pitchFamily="34" charset="-120"/>
-              </a:rPr>
-              <a:t> Pontos Fracos</a:t>
-            </a:r>
-            <a:endParaRPr lang="pt-BR" sz="1500" noProof="0" dirty="0"/>
-          </a:p>
-        </p:txBody>
-      </p:sp>
-      <p:pic>
-        <p:nvPicPr>
-          <p:cNvPr id="16" name="Image 5" descr="preencoded.png"/>
-          <p:cNvPicPr>
-            <a:picLocks noChangeAspect="1"/>
-          </p:cNvPicPr>
-          <p:nvPr/>
-        </p:nvPicPr>
-        <p:blipFill>
-          <a:blip>
+          <a:blip r:embed="rId3">
             <a:extLst>
               <a:ext uri="{96DAC541-7B7A-43D3-8B79-37D633B846F1}">
                 <asvg:svgBlip xmlns:asvg="http://schemas.microsoft.com/office/drawing/2016/SVG/main" r:embed="rId4"/>
@@ -5745,7 +5296,7 @@
         </p:blipFill>
         <p:spPr>
           <a:xfrm>
-            <a:off x="6352818" y="1871811"/>
+            <a:off x="764263" y="1871811"/>
             <a:ext cx="235639" cy="235645"/>
           </a:xfrm>
           <a:prstGeom prst="rect">
@@ -5755,14 +5306,14 @@
       </p:pic>
       <p:sp>
         <p:nvSpPr>
-          <p:cNvPr id="17" name="Text 9"/>
+          <p:cNvPr id="6" name="Text 3"/>
           <p:cNvSpPr/>
           <p:nvPr/>
         </p:nvSpPr>
         <p:spPr>
           <a:xfrm>
-            <a:off x="6804450" y="1864023"/>
-            <a:ext cx="2017464" cy="1225848"/>
+            <a:off x="1215895" y="1864023"/>
+            <a:ext cx="4644413" cy="490339"/>
           </a:xfrm>
           <a:prstGeom prst="rect">
             <a:avLst/>
@@ -5784,25 +5335,19 @@
             </a:pPr>
             <a:r>
               <a:rPr lang="pt-BR" sz="1200" b="1" noProof="0" dirty="0">
-                <a:solidFill>
-                  <a:srgbClr val="49495A"/>
-                </a:solidFill>
                 <a:latin typeface="Open Sans Bold" pitchFamily="34" charset="0"/>
                 <a:ea typeface="Open Sans Bold" pitchFamily="34" charset="-122"/>
                 <a:cs typeface="Open Sans Bold" pitchFamily="34" charset="-120"/>
               </a:rPr>
-              <a:t>Limitações severas</a:t>
+              <a:t>Colaboração em nuvem</a:t>
             </a:r>
             <a:r>
               <a:rPr lang="pt-BR" sz="1200" noProof="0" dirty="0">
-                <a:solidFill>
-                  <a:srgbClr val="49495A"/>
-                </a:solidFill>
                 <a:latin typeface="Open Sans" pitchFamily="34" charset="0"/>
                 <a:ea typeface="Open Sans" pitchFamily="34" charset="-122"/>
                 <a:cs typeface="Open Sans" pitchFamily="34" charset="-120"/>
               </a:rPr>
-              <a:t> na versão gratuita, restringindo uso prolongado sem investimento financeiro.</a:t>
+              <a:t> com sincronização em tempo real entre múltiplos usuários, eliminando conflitos de versão.</a:t>
             </a:r>
             <a:endParaRPr lang="pt-BR" sz="1200" noProof="0" dirty="0"/>
           </a:p>
@@ -5810,14 +5355,14 @@
       </p:sp>
       <p:pic>
         <p:nvPicPr>
-          <p:cNvPr id="18" name="Image 6" descr="preencoded.png"/>
+          <p:cNvPr id="7" name="Image 1" descr="preencoded.png"/>
           <p:cNvPicPr>
             <a:picLocks noChangeAspect="1"/>
           </p:cNvPicPr>
           <p:nvPr/>
         </p:nvPicPr>
         <p:blipFill>
-          <a:blip>
+          <a:blip r:embed="rId3">
             <a:extLst>
               <a:ext uri="{96DAC541-7B7A-43D3-8B79-37D633B846F1}">
                 <asvg:svgBlip xmlns:asvg="http://schemas.microsoft.com/office/drawing/2016/SVG/main" r:embed="rId4"/>
@@ -5830,7 +5375,7 @@
         </p:blipFill>
         <p:spPr>
           <a:xfrm>
-            <a:off x="9067375" y="1871811"/>
+            <a:off x="764263" y="2660600"/>
             <a:ext cx="235639" cy="235645"/>
           </a:xfrm>
           <a:prstGeom prst="rect">
@@ -5840,14 +5385,14 @@
       </p:pic>
       <p:sp>
         <p:nvSpPr>
-          <p:cNvPr id="19" name="Text 10"/>
+          <p:cNvPr id="8" name="Text 4"/>
           <p:cNvSpPr/>
           <p:nvPr/>
         </p:nvSpPr>
         <p:spPr>
           <a:xfrm>
-            <a:off x="9519007" y="1864023"/>
-            <a:ext cx="2017563" cy="1225848"/>
+            <a:off x="1215895" y="2652812"/>
+            <a:ext cx="4644413" cy="490339"/>
           </a:xfrm>
           <a:prstGeom prst="rect">
             <a:avLst/>
@@ -5869,25 +5414,19 @@
             </a:pPr>
             <a:r>
               <a:rPr lang="pt-BR" sz="1200" b="1" noProof="0" dirty="0">
-                <a:solidFill>
-                  <a:srgbClr val="49495A"/>
-                </a:solidFill>
                 <a:latin typeface="Open Sans Bold" pitchFamily="34" charset="0"/>
                 <a:ea typeface="Open Sans Bold" pitchFamily="34" charset="-122"/>
                 <a:cs typeface="Open Sans Bold" pitchFamily="34" charset="-120"/>
               </a:rPr>
-              <a:t>Dependência crítica</a:t>
+              <a:t>Curva de aprendizado rápida</a:t>
             </a:r>
             <a:r>
               <a:rPr lang="pt-BR" sz="1200" noProof="0" dirty="0">
-                <a:solidFill>
-                  <a:srgbClr val="49495A"/>
-                </a:solidFill>
                 <a:latin typeface="Open Sans" pitchFamily="34" charset="0"/>
                 <a:ea typeface="Open Sans" pitchFamily="34" charset="-122"/>
                 <a:cs typeface="Open Sans" pitchFamily="34" charset="-120"/>
               </a:rPr>
-              <a:t> de conexão com internet para funcionamento, inviabilizando uso em ambientes offline.</a:t>
+              <a:t>, permitindo produtividade imediata mesmo para usuários sem experiência prévia.</a:t>
             </a:r>
             <a:endParaRPr lang="pt-BR" sz="1200" noProof="0" dirty="0"/>
           </a:p>
@@ -5895,14 +5434,14 @@
       </p:sp>
       <p:pic>
         <p:nvPicPr>
-          <p:cNvPr id="20" name="Image 7" descr="preencoded.png"/>
+          <p:cNvPr id="9" name="Image 2" descr="preencoded.png"/>
           <p:cNvPicPr>
             <a:picLocks noChangeAspect="1"/>
           </p:cNvPicPr>
           <p:nvPr/>
         </p:nvPicPr>
         <p:blipFill>
-          <a:blip>
+          <a:blip r:embed="rId3">
             <a:extLst>
               <a:ext uri="{96DAC541-7B7A-43D3-8B79-37D633B846F1}">
                 <asvg:svgBlip xmlns:asvg="http://schemas.microsoft.com/office/drawing/2016/SVG/main" r:embed="rId4"/>
@@ -5915,7 +5454,7 @@
         </p:blipFill>
         <p:spPr>
           <a:xfrm>
-            <a:off x="6352818" y="3396109"/>
+            <a:off x="764263" y="3449389"/>
             <a:ext cx="235639" cy="235645"/>
           </a:xfrm>
           <a:prstGeom prst="rect">
@@ -5925,14 +5464,14 @@
       </p:pic>
       <p:sp>
         <p:nvSpPr>
-          <p:cNvPr id="21" name="Text 11"/>
+          <p:cNvPr id="10" name="Text 5"/>
           <p:cNvSpPr/>
           <p:nvPr/>
         </p:nvSpPr>
         <p:spPr>
           <a:xfrm>
-            <a:off x="6804450" y="3388320"/>
-            <a:ext cx="2017464" cy="1225848"/>
+            <a:off x="1215895" y="3441601"/>
+            <a:ext cx="4644413" cy="490339"/>
           </a:xfrm>
           <a:prstGeom prst="rect">
             <a:avLst/>
@@ -5954,25 +5493,19 @@
             </a:pPr>
             <a:r>
               <a:rPr lang="pt-BR" sz="1200" b="1" noProof="0" dirty="0">
-                <a:solidFill>
-                  <a:srgbClr val="49495A"/>
-                </a:solidFill>
                 <a:latin typeface="Open Sans Bold" pitchFamily="34" charset="0"/>
                 <a:ea typeface="Open Sans Bold" pitchFamily="34" charset="-122"/>
                 <a:cs typeface="Open Sans Bold" pitchFamily="34" charset="-120"/>
               </a:rPr>
-              <a:t>Preocupações com segurança</a:t>
+              <a:t>Recursos avançados de IA</a:t>
             </a:r>
             <a:r>
               <a:rPr lang="pt-BR" sz="1200" noProof="0" dirty="0">
-                <a:solidFill>
-                  <a:srgbClr val="49495A"/>
-                </a:solidFill>
                 <a:latin typeface="Open Sans" pitchFamily="34" charset="0"/>
                 <a:ea typeface="Open Sans" pitchFamily="34" charset="-122"/>
                 <a:cs typeface="Open Sans" pitchFamily="34" charset="-120"/>
               </a:rPr>
-              <a:t> de dados em ambientes corporativos altamente regulados (ex.: setor financeiro e saúde).</a:t>
+              <a:t> para automação de tarefas repetitivas e sugestões de otimização de processos.</a:t>
             </a:r>
             <a:endParaRPr lang="pt-BR" sz="1200" noProof="0" dirty="0"/>
           </a:p>
@@ -5980,14 +5513,14 @@
       </p:sp>
       <p:pic>
         <p:nvPicPr>
-          <p:cNvPr id="22" name="Image 8" descr="preencoded.png"/>
+          <p:cNvPr id="11" name="Image 3" descr="preencoded.png"/>
           <p:cNvPicPr>
             <a:picLocks noChangeAspect="1"/>
           </p:cNvPicPr>
           <p:nvPr/>
         </p:nvPicPr>
         <p:blipFill>
-          <a:blip>
+          <a:blip r:embed="rId3">
             <a:extLst>
               <a:ext uri="{96DAC541-7B7A-43D3-8B79-37D633B846F1}">
                 <asvg:svgBlip xmlns:asvg="http://schemas.microsoft.com/office/drawing/2016/SVG/main" r:embed="rId4"/>
@@ -6000,7 +5533,7 @@
         </p:blipFill>
         <p:spPr>
           <a:xfrm>
-            <a:off x="9067375" y="3396109"/>
+            <a:off x="764263" y="4238179"/>
             <a:ext cx="235639" cy="235645"/>
           </a:xfrm>
           <a:prstGeom prst="rect">
@@ -6010,14 +5543,14 @@
       </p:pic>
       <p:sp>
         <p:nvSpPr>
-          <p:cNvPr id="23" name="Text 12"/>
+          <p:cNvPr id="12" name="Text 6"/>
           <p:cNvSpPr/>
           <p:nvPr/>
         </p:nvSpPr>
         <p:spPr>
           <a:xfrm>
-            <a:off x="9519007" y="3388320"/>
-            <a:ext cx="2017563" cy="980678"/>
+            <a:off x="1215895" y="4230390"/>
+            <a:ext cx="4644413" cy="490339"/>
           </a:xfrm>
           <a:prstGeom prst="rect">
             <a:avLst/>
@@ -6039,6 +5572,472 @@
             </a:pPr>
             <a:r>
               <a:rPr lang="pt-BR" sz="1200" b="1" noProof="0" dirty="0">
+                <a:latin typeface="Open Sans Bold" pitchFamily="34" charset="0"/>
+                <a:ea typeface="Open Sans Bold" pitchFamily="34" charset="-122"/>
+                <a:cs typeface="Open Sans Bold" pitchFamily="34" charset="-120"/>
+              </a:rPr>
+              <a:t>Suporte completo e nativo</a:t>
+            </a:r>
+            <a:r>
+              <a:rPr lang="pt-BR" sz="1200" noProof="0" dirty="0">
+                <a:latin typeface="Open Sans" pitchFamily="34" charset="0"/>
+                <a:ea typeface="Open Sans" pitchFamily="34" charset="-122"/>
+                <a:cs typeface="Open Sans" pitchFamily="34" charset="-120"/>
+              </a:rPr>
+              <a:t> à notação BPMN 2.0, com bibliotecas de formas padronizadas e pré-configuradas.</a:t>
+            </a:r>
+            <a:endParaRPr lang="pt-BR" sz="1200" noProof="0" dirty="0"/>
+          </a:p>
+        </p:txBody>
+      </p:sp>
+      <p:pic>
+        <p:nvPicPr>
+          <p:cNvPr id="13" name="Image 4" descr="preencoded.png"/>
+          <p:cNvPicPr>
+            <a:picLocks noChangeAspect="1"/>
+          </p:cNvPicPr>
+          <p:nvPr/>
+        </p:nvPicPr>
+        <p:blipFill>
+          <a:blip r:embed="rId3">
+            <a:extLst>
+              <a:ext uri="{96DAC541-7B7A-43D3-8B79-37D633B846F1}">
+                <asvg:svgBlip xmlns:asvg="http://schemas.microsoft.com/office/drawing/2016/SVG/main" r:embed="rId4"/>
+              </a:ext>
+            </a:extLst>
+          </a:blip>
+          <a:stretch>
+            <a:fillRect/>
+          </a:stretch>
+        </p:blipFill>
+        <p:spPr>
+          <a:xfrm>
+            <a:off x="764263" y="5026968"/>
+            <a:ext cx="235639" cy="235645"/>
+          </a:xfrm>
+          <a:prstGeom prst="rect">
+            <a:avLst/>
+          </a:prstGeom>
+        </p:spPr>
+      </p:pic>
+      <p:sp>
+        <p:nvSpPr>
+          <p:cNvPr id="14" name="Text 7"/>
+          <p:cNvSpPr/>
+          <p:nvPr/>
+        </p:nvSpPr>
+        <p:spPr>
+          <a:xfrm>
+            <a:off x="1215895" y="5019179"/>
+            <a:ext cx="4644413" cy="490339"/>
+          </a:xfrm>
+          <a:prstGeom prst="rect">
+            <a:avLst/>
+          </a:prstGeom>
+          <a:noFill/>
+          <a:ln/>
+        </p:spPr>
+        <p:txBody>
+          <a:bodyPr wrap="square" lIns="0" tIns="0" rIns="0" bIns="0" rtlCol="0" anchor="t">
+            <a:normAutofit/>
+          </a:bodyPr>
+          <a:lstStyle/>
+          <a:p>
+            <a:pPr marL="0" indent="0" algn="l">
+              <a:lnSpc>
+                <a:spcPct val="130000"/>
+              </a:lnSpc>
+              <a:buNone/>
+            </a:pPr>
+            <a:r>
+              <a:rPr lang="pt-BR" sz="1200" b="1" noProof="0" dirty="0">
+                <a:latin typeface="Open Sans Bold" pitchFamily="34" charset="0"/>
+                <a:ea typeface="Open Sans Bold" pitchFamily="34" charset="-122"/>
+                <a:cs typeface="Open Sans Bold" pitchFamily="34" charset="-120"/>
+              </a:rPr>
+              <a:t>Interface responsiva</a:t>
+            </a:r>
+            <a:r>
+              <a:rPr lang="pt-BR" sz="1200" noProof="0" dirty="0">
+                <a:latin typeface="Open Sans" pitchFamily="34" charset="0"/>
+                <a:ea typeface="Open Sans" pitchFamily="34" charset="-122"/>
+                <a:cs typeface="Open Sans" pitchFamily="34" charset="-120"/>
+              </a:rPr>
+              <a:t> e acessível em diferentes dispositivos e sistemas operacionais.</a:t>
+            </a:r>
+            <a:endParaRPr lang="pt-BR" sz="1200" noProof="0" dirty="0"/>
+          </a:p>
+        </p:txBody>
+      </p:sp>
+      <p:sp>
+        <p:nvSpPr>
+          <p:cNvPr id="15" name="Text 8"/>
+          <p:cNvSpPr/>
+          <p:nvPr/>
+        </p:nvSpPr>
+        <p:spPr>
+          <a:xfrm>
+            <a:off x="6293883" y="1444228"/>
+            <a:ext cx="5242687" cy="251916"/>
+          </a:xfrm>
+          <a:prstGeom prst="rect">
+            <a:avLst/>
+          </a:prstGeom>
+          <a:noFill/>
+          <a:ln/>
+        </p:spPr>
+        <p:txBody>
+          <a:bodyPr wrap="none" lIns="0" tIns="0" rIns="0" bIns="0" rtlCol="0" anchor="t"/>
+          <a:lstStyle/>
+          <a:p>
+            <a:pPr marL="0" indent="0" algn="l">
+              <a:lnSpc>
+                <a:spcPct val="104000"/>
+              </a:lnSpc>
+              <a:buNone/>
+            </a:pPr>
+            <a:r>
+              <a:rPr lang="pt-BR" sz="1500" noProof="0" dirty="0">
+                <a:solidFill>
+                  <a:srgbClr val="000000"/>
+                </a:solidFill>
+                <a:latin typeface="Libre Baskerville" pitchFamily="34" charset="0"/>
+                <a:ea typeface="Libre Baskerville" pitchFamily="34" charset="-122"/>
+                <a:cs typeface="Libre Baskerville" pitchFamily="34" charset="-120"/>
+              </a:rPr>
+              <a:t>⚠️</a:t>
+            </a:r>
+            <a:r>
+              <a:rPr lang="pt-BR" sz="1500" noProof="0" dirty="0">
+                <a:solidFill>
+                  <a:srgbClr val="403CCF"/>
+                </a:solidFill>
+                <a:latin typeface="Libre Baskerville" pitchFamily="34" charset="0"/>
+                <a:ea typeface="Libre Baskerville" pitchFamily="34" charset="-122"/>
+                <a:cs typeface="Libre Baskerville" pitchFamily="34" charset="-120"/>
+              </a:rPr>
+              <a:t> Pontos Fracos</a:t>
+            </a:r>
+            <a:endParaRPr lang="pt-BR" sz="1500" noProof="0" dirty="0"/>
+          </a:p>
+        </p:txBody>
+      </p:sp>
+      <p:pic>
+        <p:nvPicPr>
+          <p:cNvPr id="16" name="Image 5" descr="preencoded.png"/>
+          <p:cNvPicPr>
+            <a:picLocks noChangeAspect="1"/>
+          </p:cNvPicPr>
+          <p:nvPr/>
+        </p:nvPicPr>
+        <p:blipFill>
+          <a:blip r:embed="rId5">
+            <a:extLst>
+              <a:ext uri="{96DAC541-7B7A-43D3-8B79-37D633B846F1}">
+                <asvg:svgBlip xmlns:asvg="http://schemas.microsoft.com/office/drawing/2016/SVG/main" r:embed="rId6"/>
+              </a:ext>
+            </a:extLst>
+          </a:blip>
+          <a:stretch>
+            <a:fillRect/>
+          </a:stretch>
+        </p:blipFill>
+        <p:spPr>
+          <a:xfrm>
+            <a:off x="6352818" y="1871811"/>
+            <a:ext cx="235639" cy="235645"/>
+          </a:xfrm>
+          <a:prstGeom prst="rect">
+            <a:avLst/>
+          </a:prstGeom>
+        </p:spPr>
+      </p:pic>
+      <p:sp>
+        <p:nvSpPr>
+          <p:cNvPr id="17" name="Text 9"/>
+          <p:cNvSpPr/>
+          <p:nvPr/>
+        </p:nvSpPr>
+        <p:spPr>
+          <a:xfrm>
+            <a:off x="6804450" y="1864023"/>
+            <a:ext cx="2017464" cy="1225848"/>
+          </a:xfrm>
+          <a:prstGeom prst="rect">
+            <a:avLst/>
+          </a:prstGeom>
+          <a:noFill/>
+          <a:ln/>
+        </p:spPr>
+        <p:txBody>
+          <a:bodyPr wrap="square" lIns="0" tIns="0" rIns="0" bIns="0" rtlCol="0" anchor="t">
+            <a:normAutofit/>
+          </a:bodyPr>
+          <a:lstStyle/>
+          <a:p>
+            <a:pPr marL="0" indent="0" algn="l">
+              <a:lnSpc>
+                <a:spcPct val="130000"/>
+              </a:lnSpc>
+              <a:buNone/>
+            </a:pPr>
+            <a:r>
+              <a:rPr lang="pt-BR" sz="1200" b="1" noProof="0" dirty="0">
+                <a:solidFill>
+                  <a:srgbClr val="49495A"/>
+                </a:solidFill>
+                <a:latin typeface="Open Sans Bold" pitchFamily="34" charset="0"/>
+                <a:ea typeface="Open Sans Bold" pitchFamily="34" charset="-122"/>
+                <a:cs typeface="Open Sans Bold" pitchFamily="34" charset="-120"/>
+              </a:rPr>
+              <a:t>Limitações severas</a:t>
+            </a:r>
+            <a:r>
+              <a:rPr lang="pt-BR" sz="1200" noProof="0" dirty="0">
+                <a:solidFill>
+                  <a:srgbClr val="49495A"/>
+                </a:solidFill>
+                <a:latin typeface="Open Sans" pitchFamily="34" charset="0"/>
+                <a:ea typeface="Open Sans" pitchFamily="34" charset="-122"/>
+                <a:cs typeface="Open Sans" pitchFamily="34" charset="-120"/>
+              </a:rPr>
+              <a:t> na versão gratuita, restringindo uso prolongado sem investimento financeiro.</a:t>
+            </a:r>
+            <a:endParaRPr lang="pt-BR" sz="1200" noProof="0" dirty="0"/>
+          </a:p>
+        </p:txBody>
+      </p:sp>
+      <p:pic>
+        <p:nvPicPr>
+          <p:cNvPr id="18" name="Image 6" descr="preencoded.png"/>
+          <p:cNvPicPr>
+            <a:picLocks noChangeAspect="1"/>
+          </p:cNvPicPr>
+          <p:nvPr/>
+        </p:nvPicPr>
+        <p:blipFill>
+          <a:blip r:embed="rId5">
+            <a:extLst>
+              <a:ext uri="{96DAC541-7B7A-43D3-8B79-37D633B846F1}">
+                <asvg:svgBlip xmlns:asvg="http://schemas.microsoft.com/office/drawing/2016/SVG/main" r:embed="rId6"/>
+              </a:ext>
+            </a:extLst>
+          </a:blip>
+          <a:stretch>
+            <a:fillRect/>
+          </a:stretch>
+        </p:blipFill>
+        <p:spPr>
+          <a:xfrm>
+            <a:off x="9067375" y="1871811"/>
+            <a:ext cx="235639" cy="235645"/>
+          </a:xfrm>
+          <a:prstGeom prst="rect">
+            <a:avLst/>
+          </a:prstGeom>
+        </p:spPr>
+      </p:pic>
+      <p:sp>
+        <p:nvSpPr>
+          <p:cNvPr id="19" name="Text 10"/>
+          <p:cNvSpPr/>
+          <p:nvPr/>
+        </p:nvSpPr>
+        <p:spPr>
+          <a:xfrm>
+            <a:off x="9519007" y="1864023"/>
+            <a:ext cx="2017563" cy="1225848"/>
+          </a:xfrm>
+          <a:prstGeom prst="rect">
+            <a:avLst/>
+          </a:prstGeom>
+          <a:noFill/>
+          <a:ln/>
+        </p:spPr>
+        <p:txBody>
+          <a:bodyPr wrap="square" lIns="0" tIns="0" rIns="0" bIns="0" rtlCol="0" anchor="t">
+            <a:normAutofit/>
+          </a:bodyPr>
+          <a:lstStyle/>
+          <a:p>
+            <a:pPr marL="0" indent="0" algn="l">
+              <a:lnSpc>
+                <a:spcPct val="130000"/>
+              </a:lnSpc>
+              <a:buNone/>
+            </a:pPr>
+            <a:r>
+              <a:rPr lang="pt-BR" sz="1200" b="1" noProof="0" dirty="0">
+                <a:solidFill>
+                  <a:srgbClr val="49495A"/>
+                </a:solidFill>
+                <a:latin typeface="Open Sans Bold" pitchFamily="34" charset="0"/>
+                <a:ea typeface="Open Sans Bold" pitchFamily="34" charset="-122"/>
+                <a:cs typeface="Open Sans Bold" pitchFamily="34" charset="-120"/>
+              </a:rPr>
+              <a:t>Dependência crítica</a:t>
+            </a:r>
+            <a:r>
+              <a:rPr lang="pt-BR" sz="1200" noProof="0" dirty="0">
+                <a:solidFill>
+                  <a:srgbClr val="49495A"/>
+                </a:solidFill>
+                <a:latin typeface="Open Sans" pitchFamily="34" charset="0"/>
+                <a:ea typeface="Open Sans" pitchFamily="34" charset="-122"/>
+                <a:cs typeface="Open Sans" pitchFamily="34" charset="-120"/>
+              </a:rPr>
+              <a:t> de conexão com internet para funcionamento, inviabilizando uso em ambientes offline.</a:t>
+            </a:r>
+            <a:endParaRPr lang="pt-BR" sz="1200" noProof="0" dirty="0"/>
+          </a:p>
+        </p:txBody>
+      </p:sp>
+      <p:pic>
+        <p:nvPicPr>
+          <p:cNvPr id="20" name="Image 7" descr="preencoded.png"/>
+          <p:cNvPicPr>
+            <a:picLocks noChangeAspect="1"/>
+          </p:cNvPicPr>
+          <p:nvPr/>
+        </p:nvPicPr>
+        <p:blipFill>
+          <a:blip r:embed="rId5">
+            <a:extLst>
+              <a:ext uri="{96DAC541-7B7A-43D3-8B79-37D633B846F1}">
+                <asvg:svgBlip xmlns:asvg="http://schemas.microsoft.com/office/drawing/2016/SVG/main" r:embed="rId6"/>
+              </a:ext>
+            </a:extLst>
+          </a:blip>
+          <a:stretch>
+            <a:fillRect/>
+          </a:stretch>
+        </p:blipFill>
+        <p:spPr>
+          <a:xfrm>
+            <a:off x="6352818" y="3396109"/>
+            <a:ext cx="235639" cy="235645"/>
+          </a:xfrm>
+          <a:prstGeom prst="rect">
+            <a:avLst/>
+          </a:prstGeom>
+        </p:spPr>
+      </p:pic>
+      <p:sp>
+        <p:nvSpPr>
+          <p:cNvPr id="21" name="Text 11"/>
+          <p:cNvSpPr/>
+          <p:nvPr/>
+        </p:nvSpPr>
+        <p:spPr>
+          <a:xfrm>
+            <a:off x="6804450" y="3388320"/>
+            <a:ext cx="2017464" cy="1225848"/>
+          </a:xfrm>
+          <a:prstGeom prst="rect">
+            <a:avLst/>
+          </a:prstGeom>
+          <a:noFill/>
+          <a:ln/>
+        </p:spPr>
+        <p:txBody>
+          <a:bodyPr wrap="square" lIns="0" tIns="0" rIns="0" bIns="0" rtlCol="0" anchor="t">
+            <a:normAutofit/>
+          </a:bodyPr>
+          <a:lstStyle/>
+          <a:p>
+            <a:pPr marL="0" indent="0" algn="l">
+              <a:lnSpc>
+                <a:spcPct val="130000"/>
+              </a:lnSpc>
+              <a:buNone/>
+            </a:pPr>
+            <a:r>
+              <a:rPr lang="pt-BR" sz="1200" b="1" noProof="0" dirty="0">
+                <a:solidFill>
+                  <a:srgbClr val="49495A"/>
+                </a:solidFill>
+                <a:latin typeface="Open Sans Bold" pitchFamily="34" charset="0"/>
+                <a:ea typeface="Open Sans Bold" pitchFamily="34" charset="-122"/>
+                <a:cs typeface="Open Sans Bold" pitchFamily="34" charset="-120"/>
+              </a:rPr>
+              <a:t>Preocupações com segurança</a:t>
+            </a:r>
+            <a:r>
+              <a:rPr lang="pt-BR" sz="1200" noProof="0" dirty="0">
+                <a:solidFill>
+                  <a:srgbClr val="49495A"/>
+                </a:solidFill>
+                <a:latin typeface="Open Sans" pitchFamily="34" charset="0"/>
+                <a:ea typeface="Open Sans" pitchFamily="34" charset="-122"/>
+                <a:cs typeface="Open Sans" pitchFamily="34" charset="-120"/>
+              </a:rPr>
+              <a:t> de dados em ambientes corporativos altamente regulados (ex.: setor financeiro e saúde).</a:t>
+            </a:r>
+            <a:endParaRPr lang="pt-BR" sz="1200" noProof="0" dirty="0"/>
+          </a:p>
+        </p:txBody>
+      </p:sp>
+      <p:pic>
+        <p:nvPicPr>
+          <p:cNvPr id="22" name="Image 8" descr="preencoded.png"/>
+          <p:cNvPicPr>
+            <a:picLocks noChangeAspect="1"/>
+          </p:cNvPicPr>
+          <p:nvPr/>
+        </p:nvPicPr>
+        <p:blipFill>
+          <a:blip r:embed="rId5">
+            <a:extLst>
+              <a:ext uri="{96DAC541-7B7A-43D3-8B79-37D633B846F1}">
+                <asvg:svgBlip xmlns:asvg="http://schemas.microsoft.com/office/drawing/2016/SVG/main" r:embed="rId6"/>
+              </a:ext>
+            </a:extLst>
+          </a:blip>
+          <a:stretch>
+            <a:fillRect/>
+          </a:stretch>
+        </p:blipFill>
+        <p:spPr>
+          <a:xfrm>
+            <a:off x="9067375" y="3396109"/>
+            <a:ext cx="235639" cy="235645"/>
+          </a:xfrm>
+          <a:prstGeom prst="rect">
+            <a:avLst/>
+          </a:prstGeom>
+        </p:spPr>
+      </p:pic>
+      <p:sp>
+        <p:nvSpPr>
+          <p:cNvPr id="23" name="Text 12"/>
+          <p:cNvSpPr/>
+          <p:nvPr/>
+        </p:nvSpPr>
+        <p:spPr>
+          <a:xfrm>
+            <a:off x="9519007" y="3388320"/>
+            <a:ext cx="2017563" cy="980678"/>
+          </a:xfrm>
+          <a:prstGeom prst="rect">
+            <a:avLst/>
+          </a:prstGeom>
+          <a:noFill/>
+          <a:ln/>
+        </p:spPr>
+        <p:txBody>
+          <a:bodyPr wrap="square" lIns="0" tIns="0" rIns="0" bIns="0" rtlCol="0" anchor="t">
+            <a:normAutofit/>
+          </a:bodyPr>
+          <a:lstStyle/>
+          <a:p>
+            <a:pPr marL="0" indent="0" algn="l">
+              <a:lnSpc>
+                <a:spcPct val="130000"/>
+              </a:lnSpc>
+              <a:buNone/>
+            </a:pPr>
+            <a:r>
+              <a:rPr lang="pt-BR" sz="1200" b="1" noProof="0" dirty="0">
                 <a:solidFill>
                   <a:srgbClr val="49495A"/>
                 </a:solidFill>
@@ -6101,7 +6100,7 @@
           <p:nvPr/>
         </p:nvPicPr>
         <p:blipFill>
-          <a:blip r:embed="rId5"/>
+          <a:blip r:embed="rId7"/>
           <a:stretch>
             <a:fillRect/>
           </a:stretch>
@@ -8209,10 +8208,10 @@
           <p:nvPr/>
         </p:nvPicPr>
         <p:blipFill>
-          <a:blip>
+          <a:blip r:embed="rId3">
             <a:extLst>
               <a:ext uri="{96DAC541-7B7A-43D3-8B79-37D633B846F1}">
-                <asvg:svgBlip xmlns:asvg="http://schemas.microsoft.com/office/drawing/2016/SVG/main" r:embed="rId3"/>
+                <asvg:svgBlip xmlns:asvg="http://schemas.microsoft.com/office/drawing/2016/SVG/main" r:embed="rId4"/>
               </a:ext>
             </a:extLst>
           </a:blip>
@@ -8294,10 +8293,10 @@
           <p:nvPr/>
         </p:nvPicPr>
         <p:blipFill>
-          <a:blip>
+          <a:blip r:embed="rId3">
             <a:extLst>
               <a:ext uri="{96DAC541-7B7A-43D3-8B79-37D633B846F1}">
-                <asvg:svgBlip xmlns:asvg="http://schemas.microsoft.com/office/drawing/2016/SVG/main" r:embed="rId3"/>
+                <asvg:svgBlip xmlns:asvg="http://schemas.microsoft.com/office/drawing/2016/SVG/main" r:embed="rId4"/>
               </a:ext>
             </a:extLst>
           </a:blip>
@@ -8379,10 +8378,10 @@
           <p:nvPr/>
         </p:nvPicPr>
         <p:blipFill>
-          <a:blip>
+          <a:blip r:embed="rId3">
             <a:extLst>
               <a:ext uri="{96DAC541-7B7A-43D3-8B79-37D633B846F1}">
-                <asvg:svgBlip xmlns:asvg="http://schemas.microsoft.com/office/drawing/2016/SVG/main" r:embed="rId3"/>
+                <asvg:svgBlip xmlns:asvg="http://schemas.microsoft.com/office/drawing/2016/SVG/main" r:embed="rId4"/>
               </a:ext>
             </a:extLst>
           </a:blip>
@@ -8464,10 +8463,10 @@
           <p:nvPr/>
         </p:nvPicPr>
         <p:blipFill>
-          <a:blip>
+          <a:blip r:embed="rId3">
             <a:extLst>
               <a:ext uri="{96DAC541-7B7A-43D3-8B79-37D633B846F1}">
-                <asvg:svgBlip xmlns:asvg="http://schemas.microsoft.com/office/drawing/2016/SVG/main" r:embed="rId3"/>
+                <asvg:svgBlip xmlns:asvg="http://schemas.microsoft.com/office/drawing/2016/SVG/main" r:embed="rId4"/>
               </a:ext>
             </a:extLst>
           </a:blip>
@@ -8549,10 +8548,10 @@
           <p:nvPr/>
         </p:nvPicPr>
         <p:blipFill>
-          <a:blip>
+          <a:blip r:embed="rId3">
             <a:extLst>
               <a:ext uri="{96DAC541-7B7A-43D3-8B79-37D633B846F1}">
-                <asvg:svgBlip xmlns:asvg="http://schemas.microsoft.com/office/drawing/2016/SVG/main" r:embed="rId3"/>
+                <asvg:svgBlip xmlns:asvg="http://schemas.microsoft.com/office/drawing/2016/SVG/main" r:embed="rId4"/>
               </a:ext>
             </a:extLst>
           </a:blip>
@@ -10348,8 +10347,8 @@
         </p:blipFill>
         <p:spPr>
           <a:xfrm>
-            <a:off x="6834909" y="1637276"/>
-            <a:ext cx="4904509" cy="3617548"/>
+            <a:off x="6406207" y="1637275"/>
+            <a:ext cx="5636268" cy="4157291"/>
           </a:xfrm>
           <a:prstGeom prst="rect">
             <a:avLst/>
@@ -11188,8 +11187,8 @@
         </p:blipFill>
         <p:spPr>
           <a:xfrm>
-            <a:off x="587679" y="2516385"/>
-            <a:ext cx="5242666" cy="3867637"/>
+            <a:off x="194339" y="2504913"/>
+            <a:ext cx="5786065" cy="4268515"/>
           </a:xfrm>
           <a:prstGeom prst="rect">
             <a:avLst/>
@@ -11353,8 +11352,8 @@
         </p:blipFill>
         <p:spPr>
           <a:xfrm>
-            <a:off x="1192472" y="1265487"/>
-            <a:ext cx="9806749" cy="4696480"/>
+            <a:off x="157303" y="1008063"/>
+            <a:ext cx="11824788" cy="5662924"/>
           </a:xfrm>
           <a:prstGeom prst="rect">
             <a:avLst/>
@@ -11522,8 +11521,8 @@
         </p:blipFill>
         <p:spPr>
           <a:xfrm>
-            <a:off x="1441053" y="1256146"/>
-            <a:ext cx="9309587" cy="4582176"/>
+            <a:off x="208693" y="984029"/>
+            <a:ext cx="11774614" cy="5795462"/>
           </a:xfrm>
           <a:prstGeom prst="rect">
             <a:avLst/>
@@ -11691,8 +11690,8 @@
         </p:blipFill>
         <p:spPr>
           <a:xfrm>
-            <a:off x="1364749" y="1236374"/>
-            <a:ext cx="9462501" cy="5078701"/>
+            <a:off x="545239" y="1008063"/>
+            <a:ext cx="10828035" cy="5811609"/>
           </a:xfrm>
           <a:prstGeom prst="rect">
             <a:avLst/>
@@ -11868,147 +11867,7 @@
           <p:nvPr/>
         </p:nvPicPr>
         <p:blipFill>
-          <a:blip>
-            <a:extLst>
-              <a:ext uri="{96DAC541-7B7A-43D3-8B79-37D633B846F1}">
-                <asvg:svgBlip xmlns:asvg="http://schemas.microsoft.com/office/drawing/2016/SVG/main" r:embed="rId3"/>
-              </a:ext>
-            </a:extLst>
-          </a:blip>
-          <a:stretch>
-            <a:fillRect/>
-          </a:stretch>
-        </p:blipFill>
-        <p:spPr>
-          <a:xfrm>
-            <a:off x="661475" y="2007096"/>
-            <a:ext cx="400536" cy="400546"/>
-          </a:xfrm>
-          <a:prstGeom prst="rect">
-            <a:avLst/>
-          </a:prstGeom>
-        </p:spPr>
-      </p:pic>
-      <p:sp>
-        <p:nvSpPr>
-          <p:cNvPr id="5" name="Text 2"/>
-          <p:cNvSpPr/>
-          <p:nvPr/>
-        </p:nvSpPr>
-        <p:spPr>
-          <a:xfrm>
-            <a:off x="661475" y="2601615"/>
-            <a:ext cx="3493603" cy="500658"/>
-          </a:xfrm>
-          <a:prstGeom prst="rect">
-            <a:avLst/>
-          </a:prstGeom>
-          <a:noFill/>
-          <a:ln/>
-        </p:spPr>
-        <p:txBody>
-          <a:bodyPr wrap="square" lIns="0" tIns="0" rIns="0" bIns="0" rtlCol="0" anchor="t">
-            <a:normAutofit/>
-          </a:bodyPr>
-          <a:lstStyle/>
-          <a:p>
-            <a:pPr marL="0" indent="0" algn="l">
-              <a:lnSpc>
-                <a:spcPct val="104000"/>
-              </a:lnSpc>
-              <a:buNone/>
-            </a:pPr>
-            <a:r>
-              <a:rPr lang="pt-BR" sz="1550" noProof="0" dirty="0">
-                <a:solidFill>
-                  <a:srgbClr val="49495A"/>
-                </a:solidFill>
-                <a:latin typeface="Libre Baskerville" pitchFamily="34" charset="0"/>
-                <a:ea typeface="Libre Baskerville" pitchFamily="34" charset="-122"/>
-                <a:cs typeface="Libre Baskerville" pitchFamily="34" charset="-120"/>
-              </a:rPr>
-              <a:t>Geração Automática de Diagramas</a:t>
-            </a:r>
-            <a:endParaRPr lang="pt-BR" sz="1550" noProof="0" dirty="0"/>
-          </a:p>
-        </p:txBody>
-      </p:sp>
-      <p:sp>
-        <p:nvSpPr>
-          <p:cNvPr id="6" name="Text 3"/>
-          <p:cNvSpPr/>
-          <p:nvPr/>
-        </p:nvSpPr>
-        <p:spPr>
-          <a:xfrm>
-            <a:off x="661475" y="3195340"/>
-            <a:ext cx="3493603" cy="1261566"/>
-          </a:xfrm>
-          <a:prstGeom prst="rect">
-            <a:avLst/>
-          </a:prstGeom>
-          <a:noFill/>
-          <a:ln/>
-        </p:spPr>
-        <p:txBody>
-          <a:bodyPr wrap="square" lIns="0" tIns="0" rIns="0" bIns="0" rtlCol="0" anchor="t">
-            <a:normAutofit/>
-          </a:bodyPr>
-          <a:lstStyle/>
-          <a:p>
-            <a:pPr marL="0" indent="0" algn="l">
-              <a:lnSpc>
-                <a:spcPct val="131000"/>
-              </a:lnSpc>
-              <a:buNone/>
-            </a:pPr>
-            <a:r>
-              <a:rPr lang="pt-BR" sz="1250" noProof="0" dirty="0">
-                <a:solidFill>
-                  <a:srgbClr val="49495A"/>
-                </a:solidFill>
-                <a:latin typeface="Open Sans" pitchFamily="34" charset="0"/>
-                <a:ea typeface="Open Sans" pitchFamily="34" charset="-122"/>
-                <a:cs typeface="Open Sans" pitchFamily="34" charset="-120"/>
-              </a:rPr>
-              <a:t>A IA é capaz de criar estruturas de processos completas a partir de </a:t>
-            </a:r>
-            <a:r>
-              <a:rPr lang="pt-BR" sz="1250" b="1" noProof="0" dirty="0">
-                <a:solidFill>
-                  <a:srgbClr val="49495A"/>
-                </a:solidFill>
-                <a:latin typeface="Open Sans Bold" pitchFamily="34" charset="0"/>
-                <a:ea typeface="Open Sans Bold" pitchFamily="34" charset="-122"/>
-                <a:cs typeface="Open Sans Bold" pitchFamily="34" charset="-120"/>
-              </a:rPr>
-              <a:t>descrições textuais em linguagem natural</a:t>
-            </a:r>
-            <a:r>
-              <a:rPr lang="pt-BR" sz="1250" noProof="0" dirty="0">
-                <a:solidFill>
-                  <a:srgbClr val="49495A"/>
-                </a:solidFill>
-                <a:latin typeface="Open Sans" pitchFamily="34" charset="0"/>
-                <a:ea typeface="Open Sans" pitchFamily="34" charset="-122"/>
-                <a:cs typeface="Open Sans" pitchFamily="34" charset="-120"/>
-              </a:rPr>
-              <a:t>, reduzindo substancialmente o trabalho manual de construção inicial do diagrama.</a:t>
-            </a:r>
-            <a:endParaRPr lang="pt-BR" sz="1250" noProof="0" dirty="0"/>
-          </a:p>
-        </p:txBody>
-      </p:sp>
-      <p:pic>
-        <p:nvPicPr>
-          <p:cNvPr id="7" name="Image 1" descr="preencoded.png"/>
-          <p:cNvPicPr>
-            <a:picLocks noChangeAspect="1"/>
-          </p:cNvPicPr>
-          <p:nvPr/>
-        </p:nvPicPr>
-        <p:blipFill>
-          <a:blip>
+          <a:blip r:embed="rId3">
             <a:extLst>
               <a:ext uri="{96DAC541-7B7A-43D3-8B79-37D633B846F1}">
                 <asvg:svgBlip xmlns:asvg="http://schemas.microsoft.com/office/drawing/2016/SVG/main" r:embed="rId4"/>
@@ -12021,7 +11880,7 @@
         </p:blipFill>
         <p:spPr>
           <a:xfrm>
-            <a:off x="4349046" y="2007096"/>
+            <a:off x="661475" y="2007096"/>
             <a:ext cx="400536" cy="400546"/>
           </a:xfrm>
           <a:prstGeom prst="rect">
@@ -12031,14 +11890,14 @@
       </p:pic>
       <p:sp>
         <p:nvSpPr>
-          <p:cNvPr id="8" name="Text 4"/>
+          <p:cNvPr id="5" name="Text 2"/>
           <p:cNvSpPr/>
           <p:nvPr/>
         </p:nvSpPr>
         <p:spPr>
           <a:xfrm>
-            <a:off x="4349046" y="2601615"/>
-            <a:ext cx="3493603" cy="250329"/>
+            <a:off x="661475" y="2601615"/>
+            <a:ext cx="3493603" cy="500658"/>
           </a:xfrm>
           <a:prstGeom prst="rect">
             <a:avLst/>
@@ -12047,7 +11906,9 @@
           <a:ln/>
         </p:spPr>
         <p:txBody>
-          <a:bodyPr wrap="none" lIns="0" tIns="0" rIns="0" bIns="0" rtlCol="0" anchor="t"/>
+          <a:bodyPr wrap="square" lIns="0" tIns="0" rIns="0" bIns="0" rtlCol="0" anchor="t">
+            <a:normAutofit/>
+          </a:bodyPr>
           <a:lstStyle/>
           <a:p>
             <a:pPr marL="0" indent="0" algn="l">
@@ -12065,7 +11926,7 @@
                 <a:ea typeface="Libre Baskerville" pitchFamily="34" charset="-122"/>
                 <a:cs typeface="Libre Baskerville" pitchFamily="34" charset="-120"/>
               </a:rPr>
-              <a:t>Sumarização de Processos</a:t>
+              <a:t>Geração Automática de Diagramas</a:t>
             </a:r>
             <a:endParaRPr lang="pt-BR" sz="1550" noProof="0" dirty="0"/>
           </a:p>
@@ -12073,14 +11934,14 @@
       </p:sp>
       <p:sp>
         <p:nvSpPr>
-          <p:cNvPr id="9" name="Text 5"/>
+          <p:cNvPr id="6" name="Text 3"/>
           <p:cNvSpPr/>
           <p:nvPr/>
         </p:nvSpPr>
         <p:spPr>
           <a:xfrm>
-            <a:off x="4349046" y="2945011"/>
-            <a:ext cx="3493603" cy="1009253"/>
+            <a:off x="661475" y="3195340"/>
+            <a:ext cx="3493603" cy="1261566"/>
           </a:xfrm>
           <a:prstGeom prst="rect">
             <a:avLst/>
@@ -12109,6 +11970,144 @@
                 <a:ea typeface="Open Sans" pitchFamily="34" charset="-122"/>
                 <a:cs typeface="Open Sans" pitchFamily="34" charset="-120"/>
               </a:rPr>
+              <a:t>A IA é capaz de criar estruturas de processos completas a partir de </a:t>
+            </a:r>
+            <a:r>
+              <a:rPr lang="pt-BR" sz="1250" b="1" noProof="0" dirty="0">
+                <a:solidFill>
+                  <a:srgbClr val="49495A"/>
+                </a:solidFill>
+                <a:latin typeface="Open Sans Bold" pitchFamily="34" charset="0"/>
+                <a:ea typeface="Open Sans Bold" pitchFamily="34" charset="-122"/>
+                <a:cs typeface="Open Sans Bold" pitchFamily="34" charset="-120"/>
+              </a:rPr>
+              <a:t>descrições textuais em linguagem natural</a:t>
+            </a:r>
+            <a:r>
+              <a:rPr lang="pt-BR" sz="1250" noProof="0" dirty="0">
+                <a:solidFill>
+                  <a:srgbClr val="49495A"/>
+                </a:solidFill>
+                <a:latin typeface="Open Sans" pitchFamily="34" charset="0"/>
+                <a:ea typeface="Open Sans" pitchFamily="34" charset="-122"/>
+                <a:cs typeface="Open Sans" pitchFamily="34" charset="-120"/>
+              </a:rPr>
+              <a:t>, reduzindo substancialmente o trabalho manual de construção inicial do diagrama.</a:t>
+            </a:r>
+            <a:endParaRPr lang="pt-BR" sz="1250" noProof="0" dirty="0"/>
+          </a:p>
+        </p:txBody>
+      </p:sp>
+      <p:pic>
+        <p:nvPicPr>
+          <p:cNvPr id="7" name="Image 1" descr="preencoded.png"/>
+          <p:cNvPicPr>
+            <a:picLocks noChangeAspect="1"/>
+          </p:cNvPicPr>
+          <p:nvPr/>
+        </p:nvPicPr>
+        <p:blipFill>
+          <a:blip r:embed="rId5">
+            <a:extLst>
+              <a:ext uri="{96DAC541-7B7A-43D3-8B79-37D633B846F1}">
+                <asvg:svgBlip xmlns:asvg="http://schemas.microsoft.com/office/drawing/2016/SVG/main" r:embed="rId6"/>
+              </a:ext>
+            </a:extLst>
+          </a:blip>
+          <a:stretch>
+            <a:fillRect/>
+          </a:stretch>
+        </p:blipFill>
+        <p:spPr>
+          <a:xfrm>
+            <a:off x="4349046" y="2007096"/>
+            <a:ext cx="400536" cy="400546"/>
+          </a:xfrm>
+          <a:prstGeom prst="rect">
+            <a:avLst/>
+          </a:prstGeom>
+        </p:spPr>
+      </p:pic>
+      <p:sp>
+        <p:nvSpPr>
+          <p:cNvPr id="8" name="Text 4"/>
+          <p:cNvSpPr/>
+          <p:nvPr/>
+        </p:nvSpPr>
+        <p:spPr>
+          <a:xfrm>
+            <a:off x="4349046" y="2601615"/>
+            <a:ext cx="3493603" cy="250329"/>
+          </a:xfrm>
+          <a:prstGeom prst="rect">
+            <a:avLst/>
+          </a:prstGeom>
+          <a:noFill/>
+          <a:ln/>
+        </p:spPr>
+        <p:txBody>
+          <a:bodyPr wrap="none" lIns="0" tIns="0" rIns="0" bIns="0" rtlCol="0" anchor="t"/>
+          <a:lstStyle/>
+          <a:p>
+            <a:pPr marL="0" indent="0" algn="l">
+              <a:lnSpc>
+                <a:spcPct val="104000"/>
+              </a:lnSpc>
+              <a:buNone/>
+            </a:pPr>
+            <a:r>
+              <a:rPr lang="pt-BR" sz="1550" noProof="0" dirty="0">
+                <a:solidFill>
+                  <a:srgbClr val="49495A"/>
+                </a:solidFill>
+                <a:latin typeface="Libre Baskerville" pitchFamily="34" charset="0"/>
+                <a:ea typeface="Libre Baskerville" pitchFamily="34" charset="-122"/>
+                <a:cs typeface="Libre Baskerville" pitchFamily="34" charset="-120"/>
+              </a:rPr>
+              <a:t>Sumarização de Processos</a:t>
+            </a:r>
+            <a:endParaRPr lang="pt-BR" sz="1550" noProof="0" dirty="0"/>
+          </a:p>
+        </p:txBody>
+      </p:sp>
+      <p:sp>
+        <p:nvSpPr>
+          <p:cNvPr id="9" name="Text 5"/>
+          <p:cNvSpPr/>
+          <p:nvPr/>
+        </p:nvSpPr>
+        <p:spPr>
+          <a:xfrm>
+            <a:off x="4349046" y="2945011"/>
+            <a:ext cx="3493603" cy="1009253"/>
+          </a:xfrm>
+          <a:prstGeom prst="rect">
+            <a:avLst/>
+          </a:prstGeom>
+          <a:noFill/>
+          <a:ln/>
+        </p:spPr>
+        <p:txBody>
+          <a:bodyPr wrap="square" lIns="0" tIns="0" rIns="0" bIns="0" rtlCol="0" anchor="t">
+            <a:normAutofit/>
+          </a:bodyPr>
+          <a:lstStyle/>
+          <a:p>
+            <a:pPr marL="0" indent="0" algn="l">
+              <a:lnSpc>
+                <a:spcPct val="131000"/>
+              </a:lnSpc>
+              <a:buNone/>
+            </a:pPr>
+            <a:r>
+              <a:rPr lang="pt-BR" sz="1250" noProof="0" dirty="0">
+                <a:solidFill>
+                  <a:srgbClr val="49495A"/>
+                </a:solidFill>
+                <a:latin typeface="Open Sans" pitchFamily="34" charset="0"/>
+                <a:ea typeface="Open Sans" pitchFamily="34" charset="-122"/>
+                <a:cs typeface="Open Sans" pitchFamily="34" charset="-120"/>
+              </a:rPr>
               <a:t>Análise automática de fluxos complexos com </a:t>
             </a:r>
             <a:r>
@@ -12146,10 +12145,10 @@
           <p:nvPr/>
         </p:nvPicPr>
         <p:blipFill>
-          <a:blip>
+          <a:blip r:embed="rId7">
             <a:extLst>
               <a:ext uri="{96DAC541-7B7A-43D3-8B79-37D633B846F1}">
-                <asvg:svgBlip xmlns:asvg="http://schemas.microsoft.com/office/drawing/2016/SVG/main" r:embed="rId5"/>
+                <asvg:svgBlip xmlns:asvg="http://schemas.microsoft.com/office/drawing/2016/SVG/main" r:embed="rId8"/>
               </a:ext>
             </a:extLst>
           </a:blip>

--- a/Modelagem-BPMN-Lucidchart.pptx
+++ b/Modelagem-BPMN-Lucidchart.pptx
@@ -10327,10 +10327,10 @@
       </p:sp>
       <p:pic>
         <p:nvPicPr>
-          <p:cNvPr id="8" name="Imagem 7">
+          <p:cNvPr id="23" name="Imagem 22">
             <a:extLst>
               <a:ext uri="{FF2B5EF4-FFF2-40B4-BE49-F238E27FC236}">
-                <a16:creationId xmlns:a16="http://schemas.microsoft.com/office/drawing/2014/main" id="{7C065AC2-E4A4-4344-13DF-B9A8F338252B}"/>
+                <a16:creationId xmlns:a16="http://schemas.microsoft.com/office/drawing/2014/main" id="{203BCBA0-77C4-7E1F-2430-5A75DB2CBC12}"/>
               </a:ext>
             </a:extLst>
           </p:cNvPr>
@@ -10347,8 +10347,8 @@
         </p:blipFill>
         <p:spPr>
           <a:xfrm>
-            <a:off x="6406207" y="1637275"/>
-            <a:ext cx="5636268" cy="4157291"/>
+            <a:off x="6475846" y="1501040"/>
+            <a:ext cx="5611323" cy="4139604"/>
           </a:xfrm>
           <a:prstGeom prst="rect">
             <a:avLst/>
@@ -10851,7 +10851,7 @@
                 <a:ea typeface="Open Sans" pitchFamily="34" charset="-122"/>
                 <a:cs typeface="Open Sans" pitchFamily="34" charset="-120"/>
               </a:rPr>
-              <a:t> obtida pela aplicação rigorosa da notação BPMN 2.0, garantindo comunicação precisa e não ambígua do processo.</a:t>
+              <a:t> obtida pela aplicação rigorosa* da notação BPMN 2.0, garantindo comunicação precisa e não ambígua do processo.</a:t>
             </a:r>
             <a:endParaRPr lang="pt-BR" sz="1300" noProof="0" dirty="0"/>
           </a:p>
@@ -11167,10 +11167,10 @@
       </p:sp>
       <p:pic>
         <p:nvPicPr>
-          <p:cNvPr id="23" name="Imagem 22">
+          <p:cNvPr id="5" name="Imagem 4">
             <a:extLst>
               <a:ext uri="{FF2B5EF4-FFF2-40B4-BE49-F238E27FC236}">
-                <a16:creationId xmlns:a16="http://schemas.microsoft.com/office/drawing/2014/main" id="{203BCBA0-77C4-7E1F-2430-5A75DB2CBC12}"/>
+                <a16:creationId xmlns:a16="http://schemas.microsoft.com/office/drawing/2014/main" id="{7C065AC2-E4A4-4344-13DF-B9A8F338252B}"/>
               </a:ext>
             </a:extLst>
           </p:cNvPr>
@@ -11187,8 +11187,8 @@
         </p:blipFill>
         <p:spPr>
           <a:xfrm>
-            <a:off x="194339" y="2504913"/>
-            <a:ext cx="5786065" cy="4268515"/>
+            <a:off x="203287" y="2462478"/>
+            <a:ext cx="5820250" cy="4292995"/>
           </a:xfrm>
           <a:prstGeom prst="rect">
             <a:avLst/>
